--- a/dist/초1/수학/시간과규칙/초1_수학_시간과규칙_03_수배열의규칙_학생용.pptx
+++ b/dist/초1/수학/시간과규칙/초1_수학_시간과규칙_03_수배열의규칙_학생용.pptx
@@ -119,13 +119,13 @@
   <p:extLst>
     <p:ext uri="{521415D9-36F7-43E2-AB2F-B90AF26B5E84}">
       <p14:sectionLst xmlns:p14="http://schemas.microsoft.com/office/powerpoint/2010/main">
-        <p14:section name="도입" id="{4e990a27-7342-1003-28a7-a5702ea294e0}">
+        <p14:section name="도입" id="{6c1aa78e-046e-3b96-eb00-406d08e158e3}">
           <p14:sldIdLst>
             <p14:sldId id="256"/>
             <p14:sldId id="257"/>
           </p14:sldIdLst>
         </p14:section>
-        <p14:section name="개념" id="{7b13ee4b-af7a-45fa-7ba7-d08b6a879a78}">
+        <p14:section name="개념" id="{54113c6a-414a-d2e0-fae8-ad7af4597854}">
           <p14:sldIdLst>
             <p14:sldId id="258"/>
             <p14:sldId id="259"/>
@@ -133,31 +133,31 @@
             <p14:sldId id="263"/>
           </p14:sldIdLst>
         </p14:section>
-        <p14:section name="연습" id="{c69a3599-a8ea-3fae-16d0-192db0e73d97}">
+        <p14:section name="연습" id="{e238fb3a-e505-8296-62d3-d2b41034b013}">
           <p14:sldIdLst>
             <p14:sldId id="260"/>
             <p14:sldId id="261"/>
             <p14:sldId id="264"/>
           </p14:sldIdLst>
         </p14:section>
-        <p14:section name="개념" id="{53580da0-f83d-49e8-2a9f-8c3b480fcf88}">
+        <p14:section name="개념" id="{cd659f89-e8d1-3aa8-22c9-a4292747acb0}">
           <p14:sldIdLst/>
         </p14:section>
-        <p14:section name="연습" id="{80462eb5-b01f-09f7-e902-a3384f80b4ad}">
+        <p14:section name="연습" id="{feb17e22-7ce3-1c6c-0552-61927c6a8622}">
           <p14:sldIdLst/>
         </p14:section>
-        <p14:section name="확인" id="{887986b4-c80e-663a-bd4a-f9871b2f42c9}">
+        <p14:section name="확인" id="{5b11430b-b2c1-bb47-603f-1e99fc3101b8}">
           <p14:sldIdLst>
             <p14:sldId id="265"/>
             <p14:sldId id="266"/>
           </p14:sldIdLst>
         </p14:section>
-        <p14:section name="정리" id="{26581bfe-effb-7b43-161a-ed005fcc26c6}">
+        <p14:section name="정리" id="{62e4ad04-14a2-3243-4a81-54c8a764f572}">
           <p14:sldIdLst>
             <p14:sldId id="267"/>
           </p14:sldIdLst>
         </p14:section>
-        <p14:section name="보충" id="{667d62e6-7553-12e8-67bf-88e938007c73}">
+        <p14:section name="보충" id="{1eb108e4-7bb5-8658-2244-5fddf23bc555}">
           <p14:sldIdLst>
             <p14:sldId id="268"/>
           </p14:sldIdLst>
@@ -4973,7 +4973,7 @@
                 <a:ea typeface="맑은 고딕" pitchFamily="34" charset="-122"/>
                 <a:cs typeface="맑은 고딕" pitchFamily="34" charset="-120"/>
               </a:rPr>
-              <a:t>보충: 1 큰 수, 10 큰 수</a:t>
+              <a:t>보충: 묶음과 낱개</a:t>
             </a:r>
             <a:endParaRPr lang="ko-KR" sz="4400" dirty="0"/>
           </a:p>

--- a/dist/초1/수학/시간과규칙/초1_수학_시간과규칙_03_수배열의규칙_학생용.pptx
+++ b/dist/초1/수학/시간과규칙/초1_수학_시간과규칙_03_수배열의규칙_학생용.pptx
@@ -119,13 +119,13 @@
   <p:extLst>
     <p:ext uri="{521415D9-36F7-43E2-AB2F-B90AF26B5E84}">
       <p14:sectionLst xmlns:p14="http://schemas.microsoft.com/office/powerpoint/2010/main">
-        <p14:section name="도입" id="{6c1aa78e-046e-3b96-eb00-406d08e158e3}">
+        <p14:section name="도입" id="{2f70c109-b8eb-7ba7-1be3-27286adc6873}">
           <p14:sldIdLst>
             <p14:sldId id="256"/>
             <p14:sldId id="257"/>
           </p14:sldIdLst>
         </p14:section>
-        <p14:section name="개념" id="{54113c6a-414a-d2e0-fae8-ad7af4597854}">
+        <p14:section name="개념" id="{000ac4bd-1e3f-444f-e21e-19f64645a156}">
           <p14:sldIdLst>
             <p14:sldId id="258"/>
             <p14:sldId id="259"/>
@@ -133,31 +133,31 @@
             <p14:sldId id="263"/>
           </p14:sldIdLst>
         </p14:section>
-        <p14:section name="연습" id="{e238fb3a-e505-8296-62d3-d2b41034b013}">
+        <p14:section name="연습" id="{e9ac1203-9c49-2f5f-3994-f0e7510d464a}">
           <p14:sldIdLst>
             <p14:sldId id="260"/>
             <p14:sldId id="261"/>
             <p14:sldId id="264"/>
           </p14:sldIdLst>
         </p14:section>
-        <p14:section name="개념" id="{cd659f89-e8d1-3aa8-22c9-a4292747acb0}">
+        <p14:section name="개념" id="{9d5d8cb8-7d94-d916-278d-4cdbde8508e4}">
           <p14:sldIdLst/>
         </p14:section>
-        <p14:section name="연습" id="{feb17e22-7ce3-1c6c-0552-61927c6a8622}">
+        <p14:section name="연습" id="{15f692f3-af84-0d17-f99c-f537a433ecaf}">
           <p14:sldIdLst/>
         </p14:section>
-        <p14:section name="확인" id="{5b11430b-b2c1-bb47-603f-1e99fc3101b8}">
+        <p14:section name="확인" id="{5aad8b20-7efd-ced6-902b-dd3519fd59b2}">
           <p14:sldIdLst>
             <p14:sldId id="265"/>
             <p14:sldId id="266"/>
           </p14:sldIdLst>
         </p14:section>
-        <p14:section name="정리" id="{62e4ad04-14a2-3243-4a81-54c8a764f572}">
+        <p14:section name="정리" id="{fd1fb4ec-fe4e-d6a1-56ac-681ade09bd79}">
           <p14:sldIdLst>
             <p14:sldId id="267"/>
           </p14:sldIdLst>
         </p14:section>
-        <p14:section name="보충" id="{1eb108e4-7bb5-8658-2244-5fddf23bc555}">
+        <p14:section name="보충" id="{94913b33-d1fb-bc92-0227-39b665175c47}">
           <p14:sldIdLst>
             <p14:sldId id="268"/>
           </p14:sldIdLst>

--- a/dist/초1/수학/시간과규칙/초1_수학_시간과규칙_03_수배열의규칙_학생용.pptx
+++ b/dist/초1/수학/시간과규칙/초1_수학_시간과규칙_03_수배열의규칙_학생용.pptx
@@ -119,13 +119,13 @@
   <p:extLst>
     <p:ext uri="{521415D9-36F7-43E2-AB2F-B90AF26B5E84}">
       <p14:sectionLst xmlns:p14="http://schemas.microsoft.com/office/powerpoint/2010/main">
-        <p14:section name="도입" id="{2f70c109-b8eb-7ba7-1be3-27286adc6873}">
+        <p14:section name="도입" id="{26779455-10a8-c66f-402c-e74170702c98}">
           <p14:sldIdLst>
             <p14:sldId id="256"/>
             <p14:sldId id="257"/>
           </p14:sldIdLst>
         </p14:section>
-        <p14:section name="개념" id="{000ac4bd-1e3f-444f-e21e-19f64645a156}">
+        <p14:section name="개념" id="{9fe0b0c9-f265-02e6-a74b-5b6eada5a061}">
           <p14:sldIdLst>
             <p14:sldId id="258"/>
             <p14:sldId id="259"/>
@@ -133,31 +133,31 @@
             <p14:sldId id="263"/>
           </p14:sldIdLst>
         </p14:section>
-        <p14:section name="연습" id="{e9ac1203-9c49-2f5f-3994-f0e7510d464a}">
+        <p14:section name="연습" id="{43da15de-30ec-e8b0-8fd1-27f0a430b19b}">
           <p14:sldIdLst>
             <p14:sldId id="260"/>
             <p14:sldId id="261"/>
             <p14:sldId id="264"/>
           </p14:sldIdLst>
         </p14:section>
-        <p14:section name="개념" id="{9d5d8cb8-7d94-d916-278d-4cdbde8508e4}">
+        <p14:section name="개념" id="{0ca00727-108a-46f0-9af4-d42a58e6d227}">
           <p14:sldIdLst/>
         </p14:section>
-        <p14:section name="연습" id="{15f692f3-af84-0d17-f99c-f537a433ecaf}">
+        <p14:section name="연습" id="{23b2d81d-f933-d5bf-3990-bbadef0e8dd5}">
           <p14:sldIdLst/>
         </p14:section>
-        <p14:section name="확인" id="{5aad8b20-7efd-ced6-902b-dd3519fd59b2}">
+        <p14:section name="확인" id="{f9c71b39-bf67-bd7f-b416-74f3356892db}">
           <p14:sldIdLst>
             <p14:sldId id="265"/>
             <p14:sldId id="266"/>
           </p14:sldIdLst>
         </p14:section>
-        <p14:section name="정리" id="{fd1fb4ec-fe4e-d6a1-56ac-681ade09bd79}">
+        <p14:section name="정리" id="{aab32f6e-d63d-8512-82ea-567cc8b083d8}">
           <p14:sldIdLst>
             <p14:sldId id="267"/>
           </p14:sldIdLst>
         </p14:section>
-        <p14:section name="보충" id="{94913b33-d1fb-bc92-0227-39b665175c47}">
+        <p14:section name="보충" id="{6bf9d64d-3699-5c06-89d0-0dee306044b5}">
           <p14:sldIdLst>
             <p14:sldId id="268"/>
           </p14:sldIdLst>
@@ -4987,12 +4987,12 @@
         </p:nvSpPr>
         <p:spPr>
           <a:xfrm>
-            <a:off x="548640" y="5349240"/>
-            <a:ext cx="11091672" cy="868680"/>
+            <a:off x="548640" y="4897120"/>
+            <a:ext cx="11091672" cy="1320800"/>
           </a:xfrm>
           <a:prstGeom prst="roundRect">
             <a:avLst>
-              <a:gd name="adj" fmla="val 12632"/>
+              <a:gd name="adj" fmla="val 8308"/>
             </a:avLst>
           </a:prstGeom>
           <a:solidFill>
@@ -5014,8 +5014,8 @@
         </p:nvSpPr>
         <p:spPr>
           <a:xfrm>
-            <a:off x="822960" y="5486400"/>
-            <a:ext cx="10543032" cy="594360"/>
+            <a:off x="822960" y="5034280"/>
+            <a:ext cx="10543032" cy="1046480"/>
           </a:xfrm>
           <a:prstGeom prst="rect">
             <a:avLst/>
@@ -5056,8 +5056,8 @@
         </p:nvSpPr>
         <p:spPr>
           <a:xfrm>
-            <a:off x="1453896" y="1592199"/>
-            <a:ext cx="274320" cy="2743200"/>
+            <a:off x="1462462" y="1380182"/>
+            <a:ext cx="271511" cy="2715113"/>
           </a:xfrm>
           <a:prstGeom prst="rect">
             <a:avLst/>
@@ -5081,8 +5081,8 @@
         </p:nvSpPr>
         <p:spPr>
           <a:xfrm>
-            <a:off x="1453896" y="1866519"/>
-            <a:ext cx="274320" cy="0"/>
+            <a:off x="1462462" y="1651694"/>
+            <a:ext cx="271511" cy="0"/>
           </a:xfrm>
           <a:prstGeom prst="line">
             <a:avLst/>
@@ -5104,8 +5104,8 @@
         </p:nvSpPr>
         <p:spPr>
           <a:xfrm>
-            <a:off x="1453896" y="2140839"/>
-            <a:ext cx="274320" cy="0"/>
+            <a:off x="1462462" y="1923205"/>
+            <a:ext cx="271511" cy="0"/>
           </a:xfrm>
           <a:prstGeom prst="line">
             <a:avLst/>
@@ -5127,8 +5127,8 @@
         </p:nvSpPr>
         <p:spPr>
           <a:xfrm>
-            <a:off x="1453896" y="2415159"/>
-            <a:ext cx="274320" cy="0"/>
+            <a:off x="1462462" y="2194716"/>
+            <a:ext cx="271511" cy="0"/>
           </a:xfrm>
           <a:prstGeom prst="line">
             <a:avLst/>
@@ -5150,8 +5150,8 @@
         </p:nvSpPr>
         <p:spPr>
           <a:xfrm>
-            <a:off x="1453896" y="2689479"/>
-            <a:ext cx="274320" cy="0"/>
+            <a:off x="1462462" y="2466228"/>
+            <a:ext cx="271511" cy="0"/>
           </a:xfrm>
           <a:prstGeom prst="line">
             <a:avLst/>
@@ -5173,8 +5173,8 @@
         </p:nvSpPr>
         <p:spPr>
           <a:xfrm>
-            <a:off x="1453896" y="2963799"/>
-            <a:ext cx="274320" cy="0"/>
+            <a:off x="1462462" y="2737739"/>
+            <a:ext cx="271511" cy="0"/>
           </a:xfrm>
           <a:prstGeom prst="line">
             <a:avLst/>
@@ -5196,8 +5196,8 @@
         </p:nvSpPr>
         <p:spPr>
           <a:xfrm>
-            <a:off x="1453896" y="3238119"/>
-            <a:ext cx="274320" cy="0"/>
+            <a:off x="1462462" y="3009250"/>
+            <a:ext cx="271511" cy="0"/>
           </a:xfrm>
           <a:prstGeom prst="line">
             <a:avLst/>
@@ -5219,8 +5219,8 @@
         </p:nvSpPr>
         <p:spPr>
           <a:xfrm>
-            <a:off x="1453896" y="3512439"/>
-            <a:ext cx="274320" cy="0"/>
+            <a:off x="1462462" y="3280762"/>
+            <a:ext cx="271511" cy="0"/>
           </a:xfrm>
           <a:prstGeom prst="line">
             <a:avLst/>
@@ -5242,8 +5242,8 @@
         </p:nvSpPr>
         <p:spPr>
           <a:xfrm>
-            <a:off x="1453896" y="3786759"/>
-            <a:ext cx="274320" cy="0"/>
+            <a:off x="1462462" y="3552273"/>
+            <a:ext cx="271511" cy="0"/>
           </a:xfrm>
           <a:prstGeom prst="line">
             <a:avLst/>
@@ -5265,8 +5265,8 @@
         </p:nvSpPr>
         <p:spPr>
           <a:xfrm>
-            <a:off x="1453896" y="4061079"/>
-            <a:ext cx="274320" cy="0"/>
+            <a:off x="1462462" y="3823784"/>
+            <a:ext cx="271511" cy="0"/>
           </a:xfrm>
           <a:prstGeom prst="line">
             <a:avLst/>
@@ -5288,8 +5288,8 @@
         </p:nvSpPr>
         <p:spPr>
           <a:xfrm>
-            <a:off x="1892808" y="1592199"/>
-            <a:ext cx="274320" cy="2743200"/>
+            <a:off x="1896881" y="1380182"/>
+            <a:ext cx="271511" cy="2715113"/>
           </a:xfrm>
           <a:prstGeom prst="rect">
             <a:avLst/>
@@ -5313,8 +5313,8 @@
         </p:nvSpPr>
         <p:spPr>
           <a:xfrm>
-            <a:off x="1892808" y="1866519"/>
-            <a:ext cx="274320" cy="0"/>
+            <a:off x="1896881" y="1651694"/>
+            <a:ext cx="271511" cy="0"/>
           </a:xfrm>
           <a:prstGeom prst="line">
             <a:avLst/>
@@ -5336,8 +5336,8 @@
         </p:nvSpPr>
         <p:spPr>
           <a:xfrm>
-            <a:off x="1892808" y="2140839"/>
-            <a:ext cx="274320" cy="0"/>
+            <a:off x="1896881" y="1923205"/>
+            <a:ext cx="271511" cy="0"/>
           </a:xfrm>
           <a:prstGeom prst="line">
             <a:avLst/>
@@ -5359,8 +5359,8 @@
         </p:nvSpPr>
         <p:spPr>
           <a:xfrm>
-            <a:off x="1892808" y="2415159"/>
-            <a:ext cx="274320" cy="0"/>
+            <a:off x="1896881" y="2194716"/>
+            <a:ext cx="271511" cy="0"/>
           </a:xfrm>
           <a:prstGeom prst="line">
             <a:avLst/>
@@ -5382,8 +5382,8 @@
         </p:nvSpPr>
         <p:spPr>
           <a:xfrm>
-            <a:off x="1892808" y="2689479"/>
-            <a:ext cx="274320" cy="0"/>
+            <a:off x="1896881" y="2466228"/>
+            <a:ext cx="271511" cy="0"/>
           </a:xfrm>
           <a:prstGeom prst="line">
             <a:avLst/>
@@ -5405,8 +5405,8 @@
         </p:nvSpPr>
         <p:spPr>
           <a:xfrm>
-            <a:off x="1892808" y="2963799"/>
-            <a:ext cx="274320" cy="0"/>
+            <a:off x="1896881" y="2737739"/>
+            <a:ext cx="271511" cy="0"/>
           </a:xfrm>
           <a:prstGeom prst="line">
             <a:avLst/>
@@ -5428,8 +5428,8 @@
         </p:nvSpPr>
         <p:spPr>
           <a:xfrm>
-            <a:off x="1892808" y="3238119"/>
-            <a:ext cx="274320" cy="0"/>
+            <a:off x="1896881" y="3009250"/>
+            <a:ext cx="271511" cy="0"/>
           </a:xfrm>
           <a:prstGeom prst="line">
             <a:avLst/>
@@ -5451,8 +5451,8 @@
         </p:nvSpPr>
         <p:spPr>
           <a:xfrm>
-            <a:off x="1892808" y="3512439"/>
-            <a:ext cx="274320" cy="0"/>
+            <a:off x="1896881" y="3280762"/>
+            <a:ext cx="271511" cy="0"/>
           </a:xfrm>
           <a:prstGeom prst="line">
             <a:avLst/>
@@ -5474,8 +5474,8 @@
         </p:nvSpPr>
         <p:spPr>
           <a:xfrm>
-            <a:off x="1892808" y="3786759"/>
-            <a:ext cx="274320" cy="0"/>
+            <a:off x="1896881" y="3552273"/>
+            <a:ext cx="271511" cy="0"/>
           </a:xfrm>
           <a:prstGeom prst="line">
             <a:avLst/>
@@ -5497,8 +5497,8 @@
         </p:nvSpPr>
         <p:spPr>
           <a:xfrm>
-            <a:off x="1892808" y="4061079"/>
-            <a:ext cx="274320" cy="0"/>
+            <a:off x="1896881" y="3823784"/>
+            <a:ext cx="271511" cy="0"/>
           </a:xfrm>
           <a:prstGeom prst="line">
             <a:avLst/>
@@ -5520,8 +5520,8 @@
         </p:nvSpPr>
         <p:spPr>
           <a:xfrm>
-            <a:off x="2331720" y="1592199"/>
-            <a:ext cx="274320" cy="2743200"/>
+            <a:off x="2331299" y="1380182"/>
+            <a:ext cx="271511" cy="2715113"/>
           </a:xfrm>
           <a:prstGeom prst="rect">
             <a:avLst/>
@@ -5545,8 +5545,8 @@
         </p:nvSpPr>
         <p:spPr>
           <a:xfrm>
-            <a:off x="2331720" y="1866519"/>
-            <a:ext cx="274320" cy="0"/>
+            <a:off x="2331299" y="1651694"/>
+            <a:ext cx="271511" cy="0"/>
           </a:xfrm>
           <a:prstGeom prst="line">
             <a:avLst/>
@@ -5568,8 +5568,8 @@
         </p:nvSpPr>
         <p:spPr>
           <a:xfrm>
-            <a:off x="2331720" y="2140839"/>
-            <a:ext cx="274320" cy="0"/>
+            <a:off x="2331299" y="1923205"/>
+            <a:ext cx="271511" cy="0"/>
           </a:xfrm>
           <a:prstGeom prst="line">
             <a:avLst/>
@@ -5591,8 +5591,8 @@
         </p:nvSpPr>
         <p:spPr>
           <a:xfrm>
-            <a:off x="2331720" y="2415159"/>
-            <a:ext cx="274320" cy="0"/>
+            <a:off x="2331299" y="2194716"/>
+            <a:ext cx="271511" cy="0"/>
           </a:xfrm>
           <a:prstGeom prst="line">
             <a:avLst/>
@@ -5614,8 +5614,8 @@
         </p:nvSpPr>
         <p:spPr>
           <a:xfrm>
-            <a:off x="2331720" y="2689479"/>
-            <a:ext cx="274320" cy="0"/>
+            <a:off x="2331299" y="2466228"/>
+            <a:ext cx="271511" cy="0"/>
           </a:xfrm>
           <a:prstGeom prst="line">
             <a:avLst/>
@@ -5637,8 +5637,8 @@
         </p:nvSpPr>
         <p:spPr>
           <a:xfrm>
-            <a:off x="2331720" y="2963799"/>
-            <a:ext cx="274320" cy="0"/>
+            <a:off x="2331299" y="2737739"/>
+            <a:ext cx="271511" cy="0"/>
           </a:xfrm>
           <a:prstGeom prst="line">
             <a:avLst/>
@@ -5660,8 +5660,8 @@
         </p:nvSpPr>
         <p:spPr>
           <a:xfrm>
-            <a:off x="2331720" y="3238119"/>
-            <a:ext cx="274320" cy="0"/>
+            <a:off x="2331299" y="3009250"/>
+            <a:ext cx="271511" cy="0"/>
           </a:xfrm>
           <a:prstGeom prst="line">
             <a:avLst/>
@@ -5683,8 +5683,8 @@
         </p:nvSpPr>
         <p:spPr>
           <a:xfrm>
-            <a:off x="2331720" y="3512439"/>
-            <a:ext cx="274320" cy="0"/>
+            <a:off x="2331299" y="3280762"/>
+            <a:ext cx="271511" cy="0"/>
           </a:xfrm>
           <a:prstGeom prst="line">
             <a:avLst/>
@@ -5706,8 +5706,8 @@
         </p:nvSpPr>
         <p:spPr>
           <a:xfrm>
-            <a:off x="2331720" y="3786759"/>
-            <a:ext cx="274320" cy="0"/>
+            <a:off x="2331299" y="3552273"/>
+            <a:ext cx="271511" cy="0"/>
           </a:xfrm>
           <a:prstGeom prst="line">
             <a:avLst/>
@@ -5729,8 +5729,8 @@
         </p:nvSpPr>
         <p:spPr>
           <a:xfrm>
-            <a:off x="2331720" y="4061079"/>
-            <a:ext cx="274320" cy="0"/>
+            <a:off x="2331299" y="3823784"/>
+            <a:ext cx="271511" cy="0"/>
           </a:xfrm>
           <a:prstGeom prst="line">
             <a:avLst/>
@@ -5752,8 +5752,8 @@
         </p:nvSpPr>
         <p:spPr>
           <a:xfrm>
-            <a:off x="2770632" y="3992499"/>
-            <a:ext cx="274320" cy="274320"/>
+            <a:off x="2765717" y="3755907"/>
+            <a:ext cx="271511" cy="271511"/>
           </a:xfrm>
           <a:prstGeom prst="rect">
             <a:avLst/>
@@ -5777,8 +5777,8 @@
         </p:nvSpPr>
         <p:spPr>
           <a:xfrm>
-            <a:off x="2770632" y="3649599"/>
-            <a:ext cx="274320" cy="274320"/>
+            <a:off x="2765717" y="3416517"/>
+            <a:ext cx="271511" cy="271511"/>
           </a:xfrm>
           <a:prstGeom prst="rect">
             <a:avLst/>
@@ -5802,8 +5802,8 @@
         </p:nvSpPr>
         <p:spPr>
           <a:xfrm>
-            <a:off x="2770632" y="3306699"/>
-            <a:ext cx="274320" cy="274320"/>
+            <a:off x="2765717" y="3077128"/>
+            <a:ext cx="271511" cy="271511"/>
           </a:xfrm>
           <a:prstGeom prst="rect">
             <a:avLst/>
@@ -5827,8 +5827,8 @@
         </p:nvSpPr>
         <p:spPr>
           <a:xfrm>
-            <a:off x="2770632" y="2963799"/>
-            <a:ext cx="274320" cy="274320"/>
+            <a:off x="2765717" y="2737739"/>
+            <a:ext cx="271511" cy="271511"/>
           </a:xfrm>
           <a:prstGeom prst="rect">
             <a:avLst/>
@@ -5852,7 +5852,7 @@
         </p:nvSpPr>
         <p:spPr>
           <a:xfrm>
-            <a:off x="548640" y="1592199"/>
+            <a:off x="548640" y="1380182"/>
             <a:ext cx="9144" cy="9144"/>
           </a:xfrm>
           <a:prstGeom prst="rect">
@@ -5881,7 +5881,7 @@
         </p:nvSpPr>
         <p:spPr>
           <a:xfrm>
-            <a:off x="548640" y="4674870"/>
+            <a:off x="548640" y="4222750"/>
             <a:ext cx="3483864" cy="445770"/>
           </a:xfrm>
           <a:prstGeom prst="rect">
@@ -5920,8 +5920,8 @@
         </p:nvSpPr>
         <p:spPr>
           <a:xfrm>
-            <a:off x="5257800" y="1592199"/>
-            <a:ext cx="274320" cy="2743200"/>
+            <a:off x="5266366" y="1380182"/>
+            <a:ext cx="271511" cy="2715113"/>
           </a:xfrm>
           <a:prstGeom prst="rect">
             <a:avLst/>
@@ -5945,8 +5945,8 @@
         </p:nvSpPr>
         <p:spPr>
           <a:xfrm>
-            <a:off x="5257800" y="1866519"/>
-            <a:ext cx="274320" cy="0"/>
+            <a:off x="5266366" y="1651694"/>
+            <a:ext cx="271511" cy="0"/>
           </a:xfrm>
           <a:prstGeom prst="line">
             <a:avLst/>
@@ -5968,8 +5968,8 @@
         </p:nvSpPr>
         <p:spPr>
           <a:xfrm>
-            <a:off x="5257800" y="2140839"/>
-            <a:ext cx="274320" cy="0"/>
+            <a:off x="5266366" y="1923205"/>
+            <a:ext cx="271511" cy="0"/>
           </a:xfrm>
           <a:prstGeom prst="line">
             <a:avLst/>
@@ -5991,8 +5991,8 @@
         </p:nvSpPr>
         <p:spPr>
           <a:xfrm>
-            <a:off x="5257800" y="2415159"/>
-            <a:ext cx="274320" cy="0"/>
+            <a:off x="5266366" y="2194716"/>
+            <a:ext cx="271511" cy="0"/>
           </a:xfrm>
           <a:prstGeom prst="line">
             <a:avLst/>
@@ -6014,8 +6014,8 @@
         </p:nvSpPr>
         <p:spPr>
           <a:xfrm>
-            <a:off x="5257800" y="2689479"/>
-            <a:ext cx="274320" cy="0"/>
+            <a:off x="5266366" y="2466228"/>
+            <a:ext cx="271511" cy="0"/>
           </a:xfrm>
           <a:prstGeom prst="line">
             <a:avLst/>
@@ -6037,8 +6037,8 @@
         </p:nvSpPr>
         <p:spPr>
           <a:xfrm>
-            <a:off x="5257800" y="2963799"/>
-            <a:ext cx="274320" cy="0"/>
+            <a:off x="5266366" y="2737739"/>
+            <a:ext cx="271511" cy="0"/>
           </a:xfrm>
           <a:prstGeom prst="line">
             <a:avLst/>
@@ -6060,8 +6060,8 @@
         </p:nvSpPr>
         <p:spPr>
           <a:xfrm>
-            <a:off x="5257800" y="3238119"/>
-            <a:ext cx="274320" cy="0"/>
+            <a:off x="5266366" y="3009250"/>
+            <a:ext cx="271511" cy="0"/>
           </a:xfrm>
           <a:prstGeom prst="line">
             <a:avLst/>
@@ -6083,8 +6083,8 @@
         </p:nvSpPr>
         <p:spPr>
           <a:xfrm>
-            <a:off x="5257800" y="3512439"/>
-            <a:ext cx="274320" cy="0"/>
+            <a:off x="5266366" y="3280762"/>
+            <a:ext cx="271511" cy="0"/>
           </a:xfrm>
           <a:prstGeom prst="line">
             <a:avLst/>
@@ -6106,8 +6106,8 @@
         </p:nvSpPr>
         <p:spPr>
           <a:xfrm>
-            <a:off x="5257800" y="3786759"/>
-            <a:ext cx="274320" cy="0"/>
+            <a:off x="5266366" y="3552273"/>
+            <a:ext cx="271511" cy="0"/>
           </a:xfrm>
           <a:prstGeom prst="line">
             <a:avLst/>
@@ -6129,8 +6129,8 @@
         </p:nvSpPr>
         <p:spPr>
           <a:xfrm>
-            <a:off x="5257800" y="4061079"/>
-            <a:ext cx="274320" cy="0"/>
+            <a:off x="5266366" y="3823784"/>
+            <a:ext cx="271511" cy="0"/>
           </a:xfrm>
           <a:prstGeom prst="line">
             <a:avLst/>
@@ -6152,8 +6152,8 @@
         </p:nvSpPr>
         <p:spPr>
           <a:xfrm>
-            <a:off x="5696712" y="1592199"/>
-            <a:ext cx="274320" cy="2743200"/>
+            <a:off x="5700785" y="1380182"/>
+            <a:ext cx="271511" cy="2715113"/>
           </a:xfrm>
           <a:prstGeom prst="rect">
             <a:avLst/>
@@ -6177,8 +6177,8 @@
         </p:nvSpPr>
         <p:spPr>
           <a:xfrm>
-            <a:off x="5696712" y="1866519"/>
-            <a:ext cx="274320" cy="0"/>
+            <a:off x="5700785" y="1651694"/>
+            <a:ext cx="271511" cy="0"/>
           </a:xfrm>
           <a:prstGeom prst="line">
             <a:avLst/>
@@ -6200,8 +6200,8 @@
         </p:nvSpPr>
         <p:spPr>
           <a:xfrm>
-            <a:off x="5696712" y="2140839"/>
-            <a:ext cx="274320" cy="0"/>
+            <a:off x="5700785" y="1923205"/>
+            <a:ext cx="271511" cy="0"/>
           </a:xfrm>
           <a:prstGeom prst="line">
             <a:avLst/>
@@ -6223,8 +6223,8 @@
         </p:nvSpPr>
         <p:spPr>
           <a:xfrm>
-            <a:off x="5696712" y="2415159"/>
-            <a:ext cx="274320" cy="0"/>
+            <a:off x="5700785" y="2194716"/>
+            <a:ext cx="271511" cy="0"/>
           </a:xfrm>
           <a:prstGeom prst="line">
             <a:avLst/>
@@ -6246,8 +6246,8 @@
         </p:nvSpPr>
         <p:spPr>
           <a:xfrm>
-            <a:off x="5696712" y="2689479"/>
-            <a:ext cx="274320" cy="0"/>
+            <a:off x="5700785" y="2466228"/>
+            <a:ext cx="271511" cy="0"/>
           </a:xfrm>
           <a:prstGeom prst="line">
             <a:avLst/>
@@ -6269,8 +6269,8 @@
         </p:nvSpPr>
         <p:spPr>
           <a:xfrm>
-            <a:off x="5696712" y="2963799"/>
-            <a:ext cx="274320" cy="0"/>
+            <a:off x="5700785" y="2737739"/>
+            <a:ext cx="271511" cy="0"/>
           </a:xfrm>
           <a:prstGeom prst="line">
             <a:avLst/>
@@ -6292,8 +6292,8 @@
         </p:nvSpPr>
         <p:spPr>
           <a:xfrm>
-            <a:off x="5696712" y="3238119"/>
-            <a:ext cx="274320" cy="0"/>
+            <a:off x="5700785" y="3009250"/>
+            <a:ext cx="271511" cy="0"/>
           </a:xfrm>
           <a:prstGeom prst="line">
             <a:avLst/>
@@ -6315,8 +6315,8 @@
         </p:nvSpPr>
         <p:spPr>
           <a:xfrm>
-            <a:off x="5696712" y="3512439"/>
-            <a:ext cx="274320" cy="0"/>
+            <a:off x="5700785" y="3280762"/>
+            <a:ext cx="271511" cy="0"/>
           </a:xfrm>
           <a:prstGeom prst="line">
             <a:avLst/>
@@ -6338,8 +6338,8 @@
         </p:nvSpPr>
         <p:spPr>
           <a:xfrm>
-            <a:off x="5696712" y="3786759"/>
-            <a:ext cx="274320" cy="0"/>
+            <a:off x="5700785" y="3552273"/>
+            <a:ext cx="271511" cy="0"/>
           </a:xfrm>
           <a:prstGeom prst="line">
             <a:avLst/>
@@ -6361,8 +6361,8 @@
         </p:nvSpPr>
         <p:spPr>
           <a:xfrm>
-            <a:off x="5696712" y="4061079"/>
-            <a:ext cx="274320" cy="0"/>
+            <a:off x="5700785" y="3823784"/>
+            <a:ext cx="271511" cy="0"/>
           </a:xfrm>
           <a:prstGeom prst="line">
             <a:avLst/>
@@ -6384,8 +6384,8 @@
         </p:nvSpPr>
         <p:spPr>
           <a:xfrm>
-            <a:off x="6135624" y="1592199"/>
-            <a:ext cx="274320" cy="2743200"/>
+            <a:off x="6135203" y="1380182"/>
+            <a:ext cx="271511" cy="2715113"/>
           </a:xfrm>
           <a:prstGeom prst="rect">
             <a:avLst/>
@@ -6409,8 +6409,8 @@
         </p:nvSpPr>
         <p:spPr>
           <a:xfrm>
-            <a:off x="6135624" y="1866519"/>
-            <a:ext cx="274320" cy="0"/>
+            <a:off x="6135203" y="1651694"/>
+            <a:ext cx="271511" cy="0"/>
           </a:xfrm>
           <a:prstGeom prst="line">
             <a:avLst/>
@@ -6432,8 +6432,8 @@
         </p:nvSpPr>
         <p:spPr>
           <a:xfrm>
-            <a:off x="6135624" y="2140839"/>
-            <a:ext cx="274320" cy="0"/>
+            <a:off x="6135203" y="1923205"/>
+            <a:ext cx="271511" cy="0"/>
           </a:xfrm>
           <a:prstGeom prst="line">
             <a:avLst/>
@@ -6455,8 +6455,8 @@
         </p:nvSpPr>
         <p:spPr>
           <a:xfrm>
-            <a:off x="6135624" y="2415159"/>
-            <a:ext cx="274320" cy="0"/>
+            <a:off x="6135203" y="2194716"/>
+            <a:ext cx="271511" cy="0"/>
           </a:xfrm>
           <a:prstGeom prst="line">
             <a:avLst/>
@@ -6478,8 +6478,8 @@
         </p:nvSpPr>
         <p:spPr>
           <a:xfrm>
-            <a:off x="6135624" y="2689479"/>
-            <a:ext cx="274320" cy="0"/>
+            <a:off x="6135203" y="2466228"/>
+            <a:ext cx="271511" cy="0"/>
           </a:xfrm>
           <a:prstGeom prst="line">
             <a:avLst/>
@@ -6501,8 +6501,8 @@
         </p:nvSpPr>
         <p:spPr>
           <a:xfrm>
-            <a:off x="6135624" y="2963799"/>
-            <a:ext cx="274320" cy="0"/>
+            <a:off x="6135203" y="2737739"/>
+            <a:ext cx="271511" cy="0"/>
           </a:xfrm>
           <a:prstGeom prst="line">
             <a:avLst/>
@@ -6524,8 +6524,8 @@
         </p:nvSpPr>
         <p:spPr>
           <a:xfrm>
-            <a:off x="6135624" y="3238119"/>
-            <a:ext cx="274320" cy="0"/>
+            <a:off x="6135203" y="3009250"/>
+            <a:ext cx="271511" cy="0"/>
           </a:xfrm>
           <a:prstGeom prst="line">
             <a:avLst/>
@@ -6547,8 +6547,8 @@
         </p:nvSpPr>
         <p:spPr>
           <a:xfrm>
-            <a:off x="6135624" y="3512439"/>
-            <a:ext cx="274320" cy="0"/>
+            <a:off x="6135203" y="3280762"/>
+            <a:ext cx="271511" cy="0"/>
           </a:xfrm>
           <a:prstGeom prst="line">
             <a:avLst/>
@@ -6570,8 +6570,8 @@
         </p:nvSpPr>
         <p:spPr>
           <a:xfrm>
-            <a:off x="6135624" y="3786759"/>
-            <a:ext cx="274320" cy="0"/>
+            <a:off x="6135203" y="3552273"/>
+            <a:ext cx="271511" cy="0"/>
           </a:xfrm>
           <a:prstGeom prst="line">
             <a:avLst/>
@@ -6593,8 +6593,8 @@
         </p:nvSpPr>
         <p:spPr>
           <a:xfrm>
-            <a:off x="6135624" y="4061079"/>
-            <a:ext cx="274320" cy="0"/>
+            <a:off x="6135203" y="3823784"/>
+            <a:ext cx="271511" cy="0"/>
           </a:xfrm>
           <a:prstGeom prst="line">
             <a:avLst/>
@@ -6616,8 +6616,8 @@
         </p:nvSpPr>
         <p:spPr>
           <a:xfrm>
-            <a:off x="6574536" y="3992499"/>
-            <a:ext cx="274320" cy="274320"/>
+            <a:off x="6569621" y="3755907"/>
+            <a:ext cx="271511" cy="271511"/>
           </a:xfrm>
           <a:prstGeom prst="rect">
             <a:avLst/>
@@ -6641,8 +6641,8 @@
         </p:nvSpPr>
         <p:spPr>
           <a:xfrm>
-            <a:off x="6574536" y="3649599"/>
-            <a:ext cx="274320" cy="274320"/>
+            <a:off x="6569621" y="3416517"/>
+            <a:ext cx="271511" cy="271511"/>
           </a:xfrm>
           <a:prstGeom prst="rect">
             <a:avLst/>
@@ -6666,8 +6666,8 @@
         </p:nvSpPr>
         <p:spPr>
           <a:xfrm>
-            <a:off x="6574536" y="3306699"/>
-            <a:ext cx="274320" cy="274320"/>
+            <a:off x="6569621" y="3077128"/>
+            <a:ext cx="271511" cy="271511"/>
           </a:xfrm>
           <a:prstGeom prst="rect">
             <a:avLst/>
@@ -6691,8 +6691,8 @@
         </p:nvSpPr>
         <p:spPr>
           <a:xfrm>
-            <a:off x="6574536" y="2963799"/>
-            <a:ext cx="274320" cy="274320"/>
+            <a:off x="6569621" y="2737739"/>
+            <a:ext cx="271511" cy="271511"/>
           </a:xfrm>
           <a:prstGeom prst="rect">
             <a:avLst/>
@@ -6716,8 +6716,8 @@
         </p:nvSpPr>
         <p:spPr>
           <a:xfrm>
-            <a:off x="6574536" y="2620899"/>
-            <a:ext cx="274320" cy="274320"/>
+            <a:off x="6569621" y="2398350"/>
+            <a:ext cx="271511" cy="271511"/>
           </a:xfrm>
           <a:prstGeom prst="rect">
             <a:avLst/>
@@ -6741,7 +6741,7 @@
         </p:nvSpPr>
         <p:spPr>
           <a:xfrm>
-            <a:off x="4352544" y="1592199"/>
+            <a:off x="4352544" y="1380182"/>
             <a:ext cx="9144" cy="9144"/>
           </a:xfrm>
           <a:prstGeom prst="rect">
@@ -6770,7 +6770,7 @@
         </p:nvSpPr>
         <p:spPr>
           <a:xfrm>
-            <a:off x="4352544" y="4674870"/>
+            <a:off x="4352544" y="4222750"/>
             <a:ext cx="3483864" cy="445770"/>
           </a:xfrm>
           <a:prstGeom prst="rect">
@@ -6809,8 +6809,8 @@
         </p:nvSpPr>
         <p:spPr>
           <a:xfrm>
-            <a:off x="8842248" y="1592199"/>
-            <a:ext cx="274320" cy="2743200"/>
+            <a:off x="8853061" y="1380182"/>
+            <a:ext cx="271511" cy="2715113"/>
           </a:xfrm>
           <a:prstGeom prst="rect">
             <a:avLst/>
@@ -6834,8 +6834,8 @@
         </p:nvSpPr>
         <p:spPr>
           <a:xfrm>
-            <a:off x="8842248" y="1866519"/>
-            <a:ext cx="274320" cy="0"/>
+            <a:off x="8853061" y="1651694"/>
+            <a:ext cx="271511" cy="0"/>
           </a:xfrm>
           <a:prstGeom prst="line">
             <a:avLst/>
@@ -6857,8 +6857,8 @@
         </p:nvSpPr>
         <p:spPr>
           <a:xfrm>
-            <a:off x="8842248" y="2140839"/>
-            <a:ext cx="274320" cy="0"/>
+            <a:off x="8853061" y="1923205"/>
+            <a:ext cx="271511" cy="0"/>
           </a:xfrm>
           <a:prstGeom prst="line">
             <a:avLst/>
@@ -6880,8 +6880,8 @@
         </p:nvSpPr>
         <p:spPr>
           <a:xfrm>
-            <a:off x="8842248" y="2415159"/>
-            <a:ext cx="274320" cy="0"/>
+            <a:off x="8853061" y="2194716"/>
+            <a:ext cx="271511" cy="0"/>
           </a:xfrm>
           <a:prstGeom prst="line">
             <a:avLst/>
@@ -6903,8 +6903,8 @@
         </p:nvSpPr>
         <p:spPr>
           <a:xfrm>
-            <a:off x="8842248" y="2689479"/>
-            <a:ext cx="274320" cy="0"/>
+            <a:off x="8853061" y="2466228"/>
+            <a:ext cx="271511" cy="0"/>
           </a:xfrm>
           <a:prstGeom prst="line">
             <a:avLst/>
@@ -6926,8 +6926,8 @@
         </p:nvSpPr>
         <p:spPr>
           <a:xfrm>
-            <a:off x="8842248" y="2963799"/>
-            <a:ext cx="274320" cy="0"/>
+            <a:off x="8853061" y="2737739"/>
+            <a:ext cx="271511" cy="0"/>
           </a:xfrm>
           <a:prstGeom prst="line">
             <a:avLst/>
@@ -6949,8 +6949,8 @@
         </p:nvSpPr>
         <p:spPr>
           <a:xfrm>
-            <a:off x="8842248" y="3238119"/>
-            <a:ext cx="274320" cy="0"/>
+            <a:off x="8853061" y="3009250"/>
+            <a:ext cx="271511" cy="0"/>
           </a:xfrm>
           <a:prstGeom prst="line">
             <a:avLst/>
@@ -6972,8 +6972,8 @@
         </p:nvSpPr>
         <p:spPr>
           <a:xfrm>
-            <a:off x="8842248" y="3512439"/>
-            <a:ext cx="274320" cy="0"/>
+            <a:off x="8853061" y="3280762"/>
+            <a:ext cx="271511" cy="0"/>
           </a:xfrm>
           <a:prstGeom prst="line">
             <a:avLst/>
@@ -6995,8 +6995,8 @@
         </p:nvSpPr>
         <p:spPr>
           <a:xfrm>
-            <a:off x="8842248" y="3786759"/>
-            <a:ext cx="274320" cy="0"/>
+            <a:off x="8853061" y="3552273"/>
+            <a:ext cx="271511" cy="0"/>
           </a:xfrm>
           <a:prstGeom prst="line">
             <a:avLst/>
@@ -7018,8 +7018,8 @@
         </p:nvSpPr>
         <p:spPr>
           <a:xfrm>
-            <a:off x="8842248" y="4061079"/>
-            <a:ext cx="274320" cy="0"/>
+            <a:off x="8853061" y="3823784"/>
+            <a:ext cx="271511" cy="0"/>
           </a:xfrm>
           <a:prstGeom prst="line">
             <a:avLst/>
@@ -7041,8 +7041,8 @@
         </p:nvSpPr>
         <p:spPr>
           <a:xfrm>
-            <a:off x="9281160" y="1592199"/>
-            <a:ext cx="274320" cy="2743200"/>
+            <a:off x="9287479" y="1380182"/>
+            <a:ext cx="271511" cy="2715113"/>
           </a:xfrm>
           <a:prstGeom prst="rect">
             <a:avLst/>
@@ -7066,8 +7066,8 @@
         </p:nvSpPr>
         <p:spPr>
           <a:xfrm>
-            <a:off x="9281160" y="1866519"/>
-            <a:ext cx="274320" cy="0"/>
+            <a:off x="9287479" y="1651694"/>
+            <a:ext cx="271511" cy="0"/>
           </a:xfrm>
           <a:prstGeom prst="line">
             <a:avLst/>
@@ -7089,8 +7089,8 @@
         </p:nvSpPr>
         <p:spPr>
           <a:xfrm>
-            <a:off x="9281160" y="2140839"/>
-            <a:ext cx="274320" cy="0"/>
+            <a:off x="9287479" y="1923205"/>
+            <a:ext cx="271511" cy="0"/>
           </a:xfrm>
           <a:prstGeom prst="line">
             <a:avLst/>
@@ -7112,8 +7112,8 @@
         </p:nvSpPr>
         <p:spPr>
           <a:xfrm>
-            <a:off x="9281160" y="2415159"/>
-            <a:ext cx="274320" cy="0"/>
+            <a:off x="9287479" y="2194716"/>
+            <a:ext cx="271511" cy="0"/>
           </a:xfrm>
           <a:prstGeom prst="line">
             <a:avLst/>
@@ -7135,8 +7135,8 @@
         </p:nvSpPr>
         <p:spPr>
           <a:xfrm>
-            <a:off x="9281160" y="2689479"/>
-            <a:ext cx="274320" cy="0"/>
+            <a:off x="9287479" y="2466228"/>
+            <a:ext cx="271511" cy="0"/>
           </a:xfrm>
           <a:prstGeom prst="line">
             <a:avLst/>
@@ -7158,8 +7158,8 @@
         </p:nvSpPr>
         <p:spPr>
           <a:xfrm>
-            <a:off x="9281160" y="2963799"/>
-            <a:ext cx="274320" cy="0"/>
+            <a:off x="9287479" y="2737739"/>
+            <a:ext cx="271511" cy="0"/>
           </a:xfrm>
           <a:prstGeom prst="line">
             <a:avLst/>
@@ -7181,8 +7181,8 @@
         </p:nvSpPr>
         <p:spPr>
           <a:xfrm>
-            <a:off x="9281160" y="3238119"/>
-            <a:ext cx="274320" cy="0"/>
+            <a:off x="9287479" y="3009250"/>
+            <a:ext cx="271511" cy="0"/>
           </a:xfrm>
           <a:prstGeom prst="line">
             <a:avLst/>
@@ -7204,8 +7204,8 @@
         </p:nvSpPr>
         <p:spPr>
           <a:xfrm>
-            <a:off x="9281160" y="3512439"/>
-            <a:ext cx="274320" cy="0"/>
+            <a:off x="9287479" y="3280762"/>
+            <a:ext cx="271511" cy="0"/>
           </a:xfrm>
           <a:prstGeom prst="line">
             <a:avLst/>
@@ -7227,8 +7227,8 @@
         </p:nvSpPr>
         <p:spPr>
           <a:xfrm>
-            <a:off x="9281160" y="3786759"/>
-            <a:ext cx="274320" cy="0"/>
+            <a:off x="9287479" y="3552273"/>
+            <a:ext cx="271511" cy="0"/>
           </a:xfrm>
           <a:prstGeom prst="line">
             <a:avLst/>
@@ -7250,8 +7250,8 @@
         </p:nvSpPr>
         <p:spPr>
           <a:xfrm>
-            <a:off x="9281160" y="4061079"/>
-            <a:ext cx="274320" cy="0"/>
+            <a:off x="9287479" y="3823784"/>
+            <a:ext cx="271511" cy="0"/>
           </a:xfrm>
           <a:prstGeom prst="line">
             <a:avLst/>
@@ -7273,8 +7273,8 @@
         </p:nvSpPr>
         <p:spPr>
           <a:xfrm>
-            <a:off x="9720072" y="1592199"/>
-            <a:ext cx="274320" cy="2743200"/>
+            <a:off x="9721898" y="1380182"/>
+            <a:ext cx="271511" cy="2715113"/>
           </a:xfrm>
           <a:prstGeom prst="rect">
             <a:avLst/>
@@ -7298,8 +7298,8 @@
         </p:nvSpPr>
         <p:spPr>
           <a:xfrm>
-            <a:off x="9720072" y="1866519"/>
-            <a:ext cx="274320" cy="0"/>
+            <a:off x="9721898" y="1651694"/>
+            <a:ext cx="271511" cy="0"/>
           </a:xfrm>
           <a:prstGeom prst="line">
             <a:avLst/>
@@ -7321,8 +7321,8 @@
         </p:nvSpPr>
         <p:spPr>
           <a:xfrm>
-            <a:off x="9720072" y="2140839"/>
-            <a:ext cx="274320" cy="0"/>
+            <a:off x="9721898" y="1923205"/>
+            <a:ext cx="271511" cy="0"/>
           </a:xfrm>
           <a:prstGeom prst="line">
             <a:avLst/>
@@ -7344,8 +7344,8 @@
         </p:nvSpPr>
         <p:spPr>
           <a:xfrm>
-            <a:off x="9720072" y="2415159"/>
-            <a:ext cx="274320" cy="0"/>
+            <a:off x="9721898" y="2194716"/>
+            <a:ext cx="271511" cy="0"/>
           </a:xfrm>
           <a:prstGeom prst="line">
             <a:avLst/>
@@ -7367,8 +7367,8 @@
         </p:nvSpPr>
         <p:spPr>
           <a:xfrm>
-            <a:off x="9720072" y="2689479"/>
-            <a:ext cx="274320" cy="0"/>
+            <a:off x="9721898" y="2466228"/>
+            <a:ext cx="271511" cy="0"/>
           </a:xfrm>
           <a:prstGeom prst="line">
             <a:avLst/>
@@ -7390,8 +7390,8 @@
         </p:nvSpPr>
         <p:spPr>
           <a:xfrm>
-            <a:off x="9720072" y="2963799"/>
-            <a:ext cx="274320" cy="0"/>
+            <a:off x="9721898" y="2737739"/>
+            <a:ext cx="271511" cy="0"/>
           </a:xfrm>
           <a:prstGeom prst="line">
             <a:avLst/>
@@ -7413,8 +7413,8 @@
         </p:nvSpPr>
         <p:spPr>
           <a:xfrm>
-            <a:off x="9720072" y="3238119"/>
-            <a:ext cx="274320" cy="0"/>
+            <a:off x="9721898" y="3009250"/>
+            <a:ext cx="271511" cy="0"/>
           </a:xfrm>
           <a:prstGeom prst="line">
             <a:avLst/>
@@ -7436,8 +7436,8 @@
         </p:nvSpPr>
         <p:spPr>
           <a:xfrm>
-            <a:off x="9720072" y="3512439"/>
-            <a:ext cx="274320" cy="0"/>
+            <a:off x="9721898" y="3280762"/>
+            <a:ext cx="271511" cy="0"/>
           </a:xfrm>
           <a:prstGeom prst="line">
             <a:avLst/>
@@ -7459,8 +7459,8 @@
         </p:nvSpPr>
         <p:spPr>
           <a:xfrm>
-            <a:off x="9720072" y="3786759"/>
-            <a:ext cx="274320" cy="0"/>
+            <a:off x="9721898" y="3552273"/>
+            <a:ext cx="271511" cy="0"/>
           </a:xfrm>
           <a:prstGeom prst="line">
             <a:avLst/>
@@ -7482,8 +7482,8 @@
         </p:nvSpPr>
         <p:spPr>
           <a:xfrm>
-            <a:off x="9720072" y="4061079"/>
-            <a:ext cx="274320" cy="0"/>
+            <a:off x="9721898" y="3823784"/>
+            <a:ext cx="271511" cy="0"/>
           </a:xfrm>
           <a:prstGeom prst="line">
             <a:avLst/>
@@ -7505,8 +7505,8 @@
         </p:nvSpPr>
         <p:spPr>
           <a:xfrm>
-            <a:off x="10158984" y="1592199"/>
-            <a:ext cx="274320" cy="2743200"/>
+            <a:off x="10156316" y="1380182"/>
+            <a:ext cx="271511" cy="2715113"/>
           </a:xfrm>
           <a:prstGeom prst="rect">
             <a:avLst/>
@@ -7530,8 +7530,8 @@
         </p:nvSpPr>
         <p:spPr>
           <a:xfrm>
-            <a:off x="10158984" y="1866519"/>
-            <a:ext cx="274320" cy="0"/>
+            <a:off x="10156316" y="1651694"/>
+            <a:ext cx="271511" cy="0"/>
           </a:xfrm>
           <a:prstGeom prst="line">
             <a:avLst/>
@@ -7553,8 +7553,8 @@
         </p:nvSpPr>
         <p:spPr>
           <a:xfrm>
-            <a:off x="10158984" y="2140839"/>
-            <a:ext cx="274320" cy="0"/>
+            <a:off x="10156316" y="1923205"/>
+            <a:ext cx="271511" cy="0"/>
           </a:xfrm>
           <a:prstGeom prst="line">
             <a:avLst/>
@@ -7576,8 +7576,8 @@
         </p:nvSpPr>
         <p:spPr>
           <a:xfrm>
-            <a:off x="10158984" y="2415159"/>
-            <a:ext cx="274320" cy="0"/>
+            <a:off x="10156316" y="2194716"/>
+            <a:ext cx="271511" cy="0"/>
           </a:xfrm>
           <a:prstGeom prst="line">
             <a:avLst/>
@@ -7599,8 +7599,8 @@
         </p:nvSpPr>
         <p:spPr>
           <a:xfrm>
-            <a:off x="10158984" y="2689479"/>
-            <a:ext cx="274320" cy="0"/>
+            <a:off x="10156316" y="2466228"/>
+            <a:ext cx="271511" cy="0"/>
           </a:xfrm>
           <a:prstGeom prst="line">
             <a:avLst/>
@@ -7622,8 +7622,8 @@
         </p:nvSpPr>
         <p:spPr>
           <a:xfrm>
-            <a:off x="10158984" y="2963799"/>
-            <a:ext cx="274320" cy="0"/>
+            <a:off x="10156316" y="2737739"/>
+            <a:ext cx="271511" cy="0"/>
           </a:xfrm>
           <a:prstGeom prst="line">
             <a:avLst/>
@@ -7645,8 +7645,8 @@
         </p:nvSpPr>
         <p:spPr>
           <a:xfrm>
-            <a:off x="10158984" y="3238119"/>
-            <a:ext cx="274320" cy="0"/>
+            <a:off x="10156316" y="3009250"/>
+            <a:ext cx="271511" cy="0"/>
           </a:xfrm>
           <a:prstGeom prst="line">
             <a:avLst/>
@@ -7668,8 +7668,8 @@
         </p:nvSpPr>
         <p:spPr>
           <a:xfrm>
-            <a:off x="10158984" y="3512439"/>
-            <a:ext cx="274320" cy="0"/>
+            <a:off x="10156316" y="3280762"/>
+            <a:ext cx="271511" cy="0"/>
           </a:xfrm>
           <a:prstGeom prst="line">
             <a:avLst/>
@@ -7691,8 +7691,8 @@
         </p:nvSpPr>
         <p:spPr>
           <a:xfrm>
-            <a:off x="10158984" y="3786759"/>
-            <a:ext cx="274320" cy="0"/>
+            <a:off x="10156316" y="3552273"/>
+            <a:ext cx="271511" cy="0"/>
           </a:xfrm>
           <a:prstGeom prst="line">
             <a:avLst/>
@@ -7714,8 +7714,8 @@
         </p:nvSpPr>
         <p:spPr>
           <a:xfrm>
-            <a:off x="10158984" y="4061079"/>
-            <a:ext cx="274320" cy="0"/>
+            <a:off x="10156316" y="3823784"/>
+            <a:ext cx="271511" cy="0"/>
           </a:xfrm>
           <a:prstGeom prst="line">
             <a:avLst/>
@@ -7737,8 +7737,8 @@
         </p:nvSpPr>
         <p:spPr>
           <a:xfrm>
-            <a:off x="10597896" y="3992499"/>
-            <a:ext cx="274320" cy="274320"/>
+            <a:off x="10590734" y="3755907"/>
+            <a:ext cx="271511" cy="271511"/>
           </a:xfrm>
           <a:prstGeom prst="rect">
             <a:avLst/>
@@ -7762,8 +7762,8 @@
         </p:nvSpPr>
         <p:spPr>
           <a:xfrm>
-            <a:off x="10597896" y="3649599"/>
-            <a:ext cx="274320" cy="274320"/>
+            <a:off x="10590734" y="3416517"/>
+            <a:ext cx="271511" cy="271511"/>
           </a:xfrm>
           <a:prstGeom prst="rect">
             <a:avLst/>
@@ -7787,8 +7787,8 @@
         </p:nvSpPr>
         <p:spPr>
           <a:xfrm>
-            <a:off x="10597896" y="3306699"/>
-            <a:ext cx="274320" cy="274320"/>
+            <a:off x="10590734" y="3077128"/>
+            <a:ext cx="271511" cy="271511"/>
           </a:xfrm>
           <a:prstGeom prst="rect">
             <a:avLst/>
@@ -7812,8 +7812,8 @@
         </p:nvSpPr>
         <p:spPr>
           <a:xfrm>
-            <a:off x="10597896" y="2963799"/>
-            <a:ext cx="274320" cy="274320"/>
+            <a:off x="10590734" y="2737739"/>
+            <a:ext cx="271511" cy="271511"/>
           </a:xfrm>
           <a:prstGeom prst="rect">
             <a:avLst/>
@@ -7837,7 +7837,7 @@
         </p:nvSpPr>
         <p:spPr>
           <a:xfrm>
-            <a:off x="8156448" y="1592199"/>
+            <a:off x="8156448" y="1380182"/>
             <a:ext cx="9144" cy="9144"/>
           </a:xfrm>
           <a:prstGeom prst="rect">
@@ -7866,7 +7866,7 @@
         </p:nvSpPr>
         <p:spPr>
           <a:xfrm>
-            <a:off x="8156448" y="4674870"/>
+            <a:off x="8156448" y="4222750"/>
             <a:ext cx="3483864" cy="445770"/>
           </a:xfrm>
           <a:prstGeom prst="rect">
